--- a/Module 2 topic 2/t2-lesson2-vertical-horizontal-transformations.pptx
+++ b/Module 2 topic 2/t2-lesson2-vertical-horizontal-transformations.pptx
@@ -2199,6 +2199,40 @@
           </a:p>
         </p:txBody>
       </p:sp>
+      <p:sp>
+        <p:nvSpPr>
+          <p:cNvPr id="8" name="Slide Number 8"/>
+          <p:cNvSpPr txBox="1"/>
+          <p:nvPr/>
+        </p:nvSpPr>
+        <p:spPr>
+          <a:xfrm>
+            <a:off x="11277295" y="6611112"/>
+            <a:ext cx="685800" cy="201168"/>
+          </a:xfrm>
+          <a:prstGeom prst="rect">
+            <a:avLst/>
+          </a:prstGeom>
+          <a:noFill/>
+        </p:spPr>
+        <p:txBody>
+          <a:bodyPr wrap="none" lIns="0" tIns="0" rIns="0" bIns="0" anchor="b">
+            <a:noAutofit/>
+          </a:bodyPr>
+          <a:lstStyle/>
+          <a:p>
+            <a:pPr algn="r"/>
+            <a:fld id="{5C1A6E0B-3B1F-4D5E-9C7A-2F4B8D6E1A90}" type="slidenum">
+              <a:rPr lang="en-US" sz="1200" dirty="0">
+                <a:solidFill>
+                  <a:srgbClr val="5F6272"/>
+                </a:solidFill>
+              </a:rPr>
+              <a:t>1</a:t>
+            </a:fld>
+          </a:p>
+        </p:txBody>
+      </p:sp>
     </p:spTree>
   </p:cSld>
   <p:clrMapOvr>
@@ -2356,6 +2390,40 @@
               <a:t xml:space="preserve">Essential Question: What effect do horizontal transformations have on linear functions? How do they compare to vertical transformations?</a:t>
             </a:r>
             <a:endParaRPr lang="en-US" sz="2400" dirty="0"/>
+          </a:p>
+        </p:txBody>
+      </p:sp>
+      <p:sp>
+        <p:nvSpPr>
+          <p:cNvPr id="5" name="Slide Number 5"/>
+          <p:cNvSpPr txBox="1"/>
+          <p:nvPr/>
+        </p:nvSpPr>
+        <p:spPr>
+          <a:xfrm>
+            <a:off x="11277295" y="6611112"/>
+            <a:ext cx="685800" cy="201168"/>
+          </a:xfrm>
+          <a:prstGeom prst="rect">
+            <a:avLst/>
+          </a:prstGeom>
+          <a:noFill/>
+        </p:spPr>
+        <p:txBody>
+          <a:bodyPr wrap="none" lIns="0" tIns="0" rIns="0" bIns="0" anchor="b">
+            <a:noAutofit/>
+          </a:bodyPr>
+          <a:lstStyle/>
+          <a:p>
+            <a:pPr algn="r"/>
+            <a:fld id="{5C1A6E0B-3B1F-4D5E-9C7A-2F4B8D6E1A90}" type="slidenum">
+              <a:rPr lang="en-US" sz="1200" dirty="0">
+                <a:solidFill>
+                  <a:srgbClr val="5F6272"/>
+                </a:solidFill>
+              </a:rPr>
+              <a:t>10</a:t>
+            </a:fld>
           </a:p>
         </p:txBody>
       </p:sp>
@@ -3722,6 +3790,40 @@
           </a:p>
         </p:txBody>
       </p:sp>
+      <p:sp>
+        <p:nvSpPr>
+          <p:cNvPr id="12" name="Slide Number 12"/>
+          <p:cNvSpPr txBox="1"/>
+          <p:nvPr/>
+        </p:nvSpPr>
+        <p:spPr>
+          <a:xfrm>
+            <a:off x="11277295" y="6611112"/>
+            <a:ext cx="685800" cy="201168"/>
+          </a:xfrm>
+          <a:prstGeom prst="rect">
+            <a:avLst/>
+          </a:prstGeom>
+          <a:noFill/>
+        </p:spPr>
+        <p:txBody>
+          <a:bodyPr wrap="none" lIns="0" tIns="0" rIns="0" bIns="0" anchor="b">
+            <a:noAutofit/>
+          </a:bodyPr>
+          <a:lstStyle/>
+          <a:p>
+            <a:pPr algn="r"/>
+            <a:fld id="{5C1A6E0B-3B1F-4D5E-9C7A-2F4B8D6E1A90}" type="slidenum">
+              <a:rPr lang="en-US" sz="1200" dirty="0">
+                <a:solidFill>
+                  <a:srgbClr val="5F6272"/>
+                </a:solidFill>
+              </a:rPr>
+              <a:t>11</a:t>
+            </a:fld>
+          </a:p>
+        </p:txBody>
+      </p:sp>
     </p:spTree>
   </p:cSld>
   <p:clrMapOvr>
@@ -7990,6 +8092,40 @@
           </a:p>
         </p:txBody>
       </p:sp>
+      <p:sp>
+        <p:nvSpPr>
+          <p:cNvPr id="98" name="Slide Number 98"/>
+          <p:cNvSpPr txBox="1"/>
+          <p:nvPr/>
+        </p:nvSpPr>
+        <p:spPr>
+          <a:xfrm>
+            <a:off x="11277295" y="6611112"/>
+            <a:ext cx="685800" cy="201168"/>
+          </a:xfrm>
+          <a:prstGeom prst="rect">
+            <a:avLst/>
+          </a:prstGeom>
+          <a:noFill/>
+        </p:spPr>
+        <p:txBody>
+          <a:bodyPr wrap="none" lIns="0" tIns="0" rIns="0" bIns="0" anchor="b">
+            <a:noAutofit/>
+          </a:bodyPr>
+          <a:lstStyle/>
+          <a:p>
+            <a:pPr algn="r"/>
+            <a:fld id="{5C1A6E0B-3B1F-4D5E-9C7A-2F4B8D6E1A90}" type="slidenum">
+              <a:rPr lang="en-US" sz="1200" dirty="0">
+                <a:solidFill>
+                  <a:srgbClr val="5F6272"/>
+                </a:solidFill>
+              </a:rPr>
+              <a:t>12</a:t>
+            </a:fld>
+          </a:p>
+        </p:txBody>
+      </p:sp>
     </p:spTree>
   </p:cSld>
   <p:clrMapOvr>
@@ -13108,6 +13244,40 @@
           </a:p>
         </p:txBody>
       </p:sp>
+      <p:sp>
+        <p:nvSpPr>
+          <p:cNvPr id="55" name="Slide Number 55"/>
+          <p:cNvSpPr txBox="1"/>
+          <p:nvPr/>
+        </p:nvSpPr>
+        <p:spPr>
+          <a:xfrm>
+            <a:off x="11277295" y="6611112"/>
+            <a:ext cx="685800" cy="201168"/>
+          </a:xfrm>
+          <a:prstGeom prst="rect">
+            <a:avLst/>
+          </a:prstGeom>
+          <a:noFill/>
+        </p:spPr>
+        <p:txBody>
+          <a:bodyPr wrap="none" lIns="0" tIns="0" rIns="0" bIns="0" anchor="b">
+            <a:noAutofit/>
+          </a:bodyPr>
+          <a:lstStyle/>
+          <a:p>
+            <a:pPr algn="r"/>
+            <a:fld id="{5C1A6E0B-3B1F-4D5E-9C7A-2F4B8D6E1A90}" type="slidenum">
+              <a:rPr lang="en-US" sz="1200" dirty="0">
+                <a:solidFill>
+                  <a:srgbClr val="5F6272"/>
+                </a:solidFill>
+              </a:rPr>
+              <a:t>13</a:t>
+            </a:fld>
+          </a:p>
+        </p:txBody>
+      </p:sp>
     </p:spTree>
   </p:cSld>
   <p:clrMapOvr>
@@ -17171,6 +17341,40 @@
           </a:ln>
         </p:spPr>
       </p:cxnSp>
+      <p:sp>
+        <p:nvSpPr>
+          <p:cNvPr id="53" name="Slide Number 53"/>
+          <p:cNvSpPr txBox="1"/>
+          <p:nvPr/>
+        </p:nvSpPr>
+        <p:spPr>
+          <a:xfrm>
+            <a:off x="11277295" y="6611112"/>
+            <a:ext cx="685800" cy="201168"/>
+          </a:xfrm>
+          <a:prstGeom prst="rect">
+            <a:avLst/>
+          </a:prstGeom>
+          <a:noFill/>
+        </p:spPr>
+        <p:txBody>
+          <a:bodyPr wrap="none" lIns="0" tIns="0" rIns="0" bIns="0" anchor="b">
+            <a:noAutofit/>
+          </a:bodyPr>
+          <a:lstStyle/>
+          <a:p>
+            <a:pPr algn="r"/>
+            <a:fld id="{5C1A6E0B-3B1F-4D5E-9C7A-2F4B8D6E1A90}" type="slidenum">
+              <a:rPr lang="en-US" sz="1200" dirty="0">
+                <a:solidFill>
+                  <a:srgbClr val="5F6272"/>
+                </a:solidFill>
+              </a:rPr>
+              <a:t>14</a:t>
+            </a:fld>
+          </a:p>
+        </p:txBody>
+      </p:sp>
     </p:spTree>
   </p:cSld>
   <p:clrMapOvr>
@@ -19643,6 +19847,40 @@
               <a:t xml:space="preserve"> + 5</a:t>
             </a:r>
             <a:endParaRPr lang="en-US" sz="2325" dirty="0"/>
+          </a:p>
+        </p:txBody>
+      </p:sp>
+      <p:sp>
+        <p:nvSpPr>
+          <p:cNvPr id="28" name="Slide Number 28"/>
+          <p:cNvSpPr txBox="1"/>
+          <p:nvPr/>
+        </p:nvSpPr>
+        <p:spPr>
+          <a:xfrm>
+            <a:off x="11277295" y="6611112"/>
+            <a:ext cx="685800" cy="201168"/>
+          </a:xfrm>
+          <a:prstGeom prst="rect">
+            <a:avLst/>
+          </a:prstGeom>
+          <a:noFill/>
+        </p:spPr>
+        <p:txBody>
+          <a:bodyPr wrap="none" lIns="0" tIns="0" rIns="0" bIns="0" anchor="b">
+            <a:noAutofit/>
+          </a:bodyPr>
+          <a:lstStyle/>
+          <a:p>
+            <a:pPr algn="r"/>
+            <a:fld id="{5C1A6E0B-3B1F-4D5E-9C7A-2F4B8D6E1A90}" type="slidenum">
+              <a:rPr lang="en-US" sz="1200" dirty="0">
+                <a:solidFill>
+                  <a:srgbClr val="5F6272"/>
+                </a:solidFill>
+              </a:rPr>
+              <a:t>15</a:t>
+            </a:fld>
           </a:p>
         </p:txBody>
       </p:sp>
@@ -21838,6 +22076,40 @@
           </a:p>
         </p:txBody>
       </p:sp>
+      <p:sp>
+        <p:nvSpPr>
+          <p:cNvPr id="16" name="Slide Number 16"/>
+          <p:cNvSpPr txBox="1"/>
+          <p:nvPr/>
+        </p:nvSpPr>
+        <p:spPr>
+          <a:xfrm>
+            <a:off x="11277295" y="6611112"/>
+            <a:ext cx="685800" cy="201168"/>
+          </a:xfrm>
+          <a:prstGeom prst="rect">
+            <a:avLst/>
+          </a:prstGeom>
+          <a:noFill/>
+        </p:spPr>
+        <p:txBody>
+          <a:bodyPr wrap="none" lIns="0" tIns="0" rIns="0" bIns="0" anchor="b">
+            <a:noAutofit/>
+          </a:bodyPr>
+          <a:lstStyle/>
+          <a:p>
+            <a:pPr algn="r"/>
+            <a:fld id="{5C1A6E0B-3B1F-4D5E-9C7A-2F4B8D6E1A90}" type="slidenum">
+              <a:rPr lang="en-US" sz="1200" dirty="0">
+                <a:solidFill>
+                  <a:srgbClr val="5F6272"/>
+                </a:solidFill>
+              </a:rPr>
+              <a:t>16</a:t>
+            </a:fld>
+          </a:p>
+        </p:txBody>
+      </p:sp>
     </p:spTree>
   </p:cSld>
   <p:clrMapOvr>
@@ -22922,6 +23194,40 @@
           </a:p>
         </p:txBody>
       </p:sp>
+      <p:sp>
+        <p:nvSpPr>
+          <p:cNvPr id="7" name="Slide Number 7"/>
+          <p:cNvSpPr txBox="1"/>
+          <p:nvPr/>
+        </p:nvSpPr>
+        <p:spPr>
+          <a:xfrm>
+            <a:off x="11277295" y="6611112"/>
+            <a:ext cx="685800" cy="201168"/>
+          </a:xfrm>
+          <a:prstGeom prst="rect">
+            <a:avLst/>
+          </a:prstGeom>
+          <a:noFill/>
+        </p:spPr>
+        <p:txBody>
+          <a:bodyPr wrap="none" lIns="0" tIns="0" rIns="0" bIns="0" anchor="b">
+            <a:noAutofit/>
+          </a:bodyPr>
+          <a:lstStyle/>
+          <a:p>
+            <a:pPr algn="r"/>
+            <a:fld id="{5C1A6E0B-3B1F-4D5E-9C7A-2F4B8D6E1A90}" type="slidenum">
+              <a:rPr lang="en-US" sz="1200" dirty="0">
+                <a:solidFill>
+                  <a:srgbClr val="5F6272"/>
+                </a:solidFill>
+              </a:rPr>
+              <a:t>17</a:t>
+            </a:fld>
+          </a:p>
+        </p:txBody>
+      </p:sp>
     </p:spTree>
   </p:cSld>
   <p:clrMapOvr>
@@ -24111,6 +24417,40 @@
           </a:p>
         </p:txBody>
       </p:sp>
+      <p:sp>
+        <p:nvSpPr>
+          <p:cNvPr id="10" name="Slide Number 10"/>
+          <p:cNvSpPr txBox="1"/>
+          <p:nvPr/>
+        </p:nvSpPr>
+        <p:spPr>
+          <a:xfrm>
+            <a:off x="11277295" y="6611112"/>
+            <a:ext cx="685800" cy="201168"/>
+          </a:xfrm>
+          <a:prstGeom prst="rect">
+            <a:avLst/>
+          </a:prstGeom>
+          <a:noFill/>
+        </p:spPr>
+        <p:txBody>
+          <a:bodyPr wrap="none" lIns="0" tIns="0" rIns="0" bIns="0" anchor="b">
+            <a:noAutofit/>
+          </a:bodyPr>
+          <a:lstStyle/>
+          <a:p>
+            <a:pPr algn="r"/>
+            <a:fld id="{5C1A6E0B-3B1F-4D5E-9C7A-2F4B8D6E1A90}" type="slidenum">
+              <a:rPr lang="en-US" sz="1200" dirty="0">
+                <a:solidFill>
+                  <a:srgbClr val="5F6272"/>
+                </a:solidFill>
+              </a:rPr>
+              <a:t>18</a:t>
+            </a:fld>
+          </a:p>
+        </p:txBody>
+      </p:sp>
     </p:spTree>
   </p:cSld>
   <p:clrMapOvr>
@@ -25236,6 +25576,40 @@
           </a:p>
         </p:txBody>
       </p:sp>
+      <p:sp>
+        <p:nvSpPr>
+          <p:cNvPr id="16" name="Slide Number 16"/>
+          <p:cNvSpPr txBox="1"/>
+          <p:nvPr/>
+        </p:nvSpPr>
+        <p:spPr>
+          <a:xfrm>
+            <a:off x="11277295" y="6611112"/>
+            <a:ext cx="685800" cy="201168"/>
+          </a:xfrm>
+          <a:prstGeom prst="rect">
+            <a:avLst/>
+          </a:prstGeom>
+          <a:noFill/>
+        </p:spPr>
+        <p:txBody>
+          <a:bodyPr wrap="none" lIns="0" tIns="0" rIns="0" bIns="0" anchor="b">
+            <a:noAutofit/>
+          </a:bodyPr>
+          <a:lstStyle/>
+          <a:p>
+            <a:pPr algn="r"/>
+            <a:fld id="{5C1A6E0B-3B1F-4D5E-9C7A-2F4B8D6E1A90}" type="slidenum">
+              <a:rPr lang="en-US" sz="1200" dirty="0">
+                <a:solidFill>
+                  <a:srgbClr val="5F6272"/>
+                </a:solidFill>
+              </a:rPr>
+              <a:t>19</a:t>
+            </a:fld>
+          </a:p>
+        </p:txBody>
+      </p:sp>
     </p:spTree>
   </p:cSld>
   <p:clrMapOvr>
@@ -26794,6 +27168,40 @@
           </a:p>
         </p:txBody>
       </p:sp>
+      <p:sp>
+        <p:nvSpPr>
+          <p:cNvPr id="12" name="Slide Number 12"/>
+          <p:cNvSpPr txBox="1"/>
+          <p:nvPr/>
+        </p:nvSpPr>
+        <p:spPr>
+          <a:xfrm>
+            <a:off x="11277295" y="6611112"/>
+            <a:ext cx="685800" cy="201168"/>
+          </a:xfrm>
+          <a:prstGeom prst="rect">
+            <a:avLst/>
+          </a:prstGeom>
+          <a:noFill/>
+        </p:spPr>
+        <p:txBody>
+          <a:bodyPr wrap="none" lIns="0" tIns="0" rIns="0" bIns="0" anchor="b">
+            <a:noAutofit/>
+          </a:bodyPr>
+          <a:lstStyle/>
+          <a:p>
+            <a:pPr algn="r"/>
+            <a:fld id="{5C1A6E0B-3B1F-4D5E-9C7A-2F4B8D6E1A90}" type="slidenum">
+              <a:rPr lang="en-US" sz="1200" dirty="0">
+                <a:solidFill>
+                  <a:srgbClr val="5F6272"/>
+                </a:solidFill>
+              </a:rPr>
+              <a:t>2</a:t>
+            </a:fld>
+          </a:p>
+        </p:txBody>
+      </p:sp>
     </p:spTree>
   </p:cSld>
   <p:clrMapOvr>
@@ -27832,6 +28240,40 @@
           </a:p>
         </p:txBody>
       </p:sp>
+      <p:sp>
+        <p:nvSpPr>
+          <p:cNvPr id="15" name="Slide Number 15"/>
+          <p:cNvSpPr txBox="1"/>
+          <p:nvPr/>
+        </p:nvSpPr>
+        <p:spPr>
+          <a:xfrm>
+            <a:off x="11277295" y="6611112"/>
+            <a:ext cx="685800" cy="201168"/>
+          </a:xfrm>
+          <a:prstGeom prst="rect">
+            <a:avLst/>
+          </a:prstGeom>
+          <a:noFill/>
+        </p:spPr>
+        <p:txBody>
+          <a:bodyPr wrap="none" lIns="0" tIns="0" rIns="0" bIns="0" anchor="b">
+            <a:noAutofit/>
+          </a:bodyPr>
+          <a:lstStyle/>
+          <a:p>
+            <a:pPr algn="r"/>
+            <a:fld id="{5C1A6E0B-3B1F-4D5E-9C7A-2F4B8D6E1A90}" type="slidenum">
+              <a:rPr lang="en-US" sz="1200" dirty="0">
+                <a:solidFill>
+                  <a:srgbClr val="5F6272"/>
+                </a:solidFill>
+              </a:rPr>
+              <a:t>20</a:t>
+            </a:fld>
+          </a:p>
+        </p:txBody>
+      </p:sp>
     </p:spTree>
   </p:cSld>
   <p:clrMapOvr>
@@ -28303,6 +28745,40 @@
               <a:t xml:space="preserve">).</a:t>
             </a:r>
             <a:endParaRPr lang="en-US" sz="1950" dirty="0"/>
+          </a:p>
+        </p:txBody>
+      </p:sp>
+      <p:sp>
+        <p:nvSpPr>
+          <p:cNvPr id="6" name="Slide Number 6"/>
+          <p:cNvSpPr txBox="1"/>
+          <p:nvPr/>
+        </p:nvSpPr>
+        <p:spPr>
+          <a:xfrm>
+            <a:off x="11277295" y="6611112"/>
+            <a:ext cx="685800" cy="201168"/>
+          </a:xfrm>
+          <a:prstGeom prst="rect">
+            <a:avLst/>
+          </a:prstGeom>
+          <a:noFill/>
+        </p:spPr>
+        <p:txBody>
+          <a:bodyPr wrap="none" lIns="0" tIns="0" rIns="0" bIns="0" anchor="b">
+            <a:noAutofit/>
+          </a:bodyPr>
+          <a:lstStyle/>
+          <a:p>
+            <a:pPr algn="r"/>
+            <a:fld id="{5C1A6E0B-3B1F-4D5E-9C7A-2F4B8D6E1A90}" type="slidenum">
+              <a:rPr lang="en-US" sz="1200" dirty="0">
+                <a:solidFill>
+                  <a:srgbClr val="5F6272"/>
+                </a:solidFill>
+              </a:rPr>
+              <a:t>3</a:t>
+            </a:fld>
           </a:p>
         </p:txBody>
       </p:sp>
@@ -28694,6 +29170,40 @@
           </a:p>
         </p:txBody>
       </p:sp>
+      <p:sp>
+        <p:nvSpPr>
+          <p:cNvPr id="5" name="Slide Number 5"/>
+          <p:cNvSpPr txBox="1"/>
+          <p:nvPr/>
+        </p:nvSpPr>
+        <p:spPr>
+          <a:xfrm>
+            <a:off x="11277295" y="6611112"/>
+            <a:ext cx="685800" cy="201168"/>
+          </a:xfrm>
+          <a:prstGeom prst="rect">
+            <a:avLst/>
+          </a:prstGeom>
+          <a:noFill/>
+        </p:spPr>
+        <p:txBody>
+          <a:bodyPr wrap="none" lIns="0" tIns="0" rIns="0" bIns="0" anchor="b">
+            <a:noAutofit/>
+          </a:bodyPr>
+          <a:lstStyle/>
+          <a:p>
+            <a:pPr algn="r"/>
+            <a:fld id="{5C1A6E0B-3B1F-4D5E-9C7A-2F4B8D6E1A90}" type="slidenum">
+              <a:rPr lang="en-US" sz="1200" dirty="0">
+                <a:solidFill>
+                  <a:srgbClr val="5F6272"/>
+                </a:solidFill>
+              </a:rPr>
+              <a:t>4</a:t>
+            </a:fld>
+          </a:p>
+        </p:txBody>
+      </p:sp>
     </p:spTree>
   </p:cSld>
   <p:clrMapOvr>
@@ -32201,6 +32711,40 @@
           </a:p>
         </p:txBody>
       </p:sp>
+      <p:sp>
+        <p:nvSpPr>
+          <p:cNvPr id="103" name="Slide Number 103"/>
+          <p:cNvSpPr txBox="1"/>
+          <p:nvPr/>
+        </p:nvSpPr>
+        <p:spPr>
+          <a:xfrm>
+            <a:off x="11277295" y="6611112"/>
+            <a:ext cx="685800" cy="201168"/>
+          </a:xfrm>
+          <a:prstGeom prst="rect">
+            <a:avLst/>
+          </a:prstGeom>
+          <a:noFill/>
+        </p:spPr>
+        <p:txBody>
+          <a:bodyPr wrap="none" lIns="0" tIns="0" rIns="0" bIns="0" anchor="b">
+            <a:noAutofit/>
+          </a:bodyPr>
+          <a:lstStyle/>
+          <a:p>
+            <a:pPr algn="r"/>
+            <a:fld id="{5C1A6E0B-3B1F-4D5E-9C7A-2F4B8D6E1A90}" type="slidenum">
+              <a:rPr lang="en-US" sz="1200" dirty="0">
+                <a:solidFill>
+                  <a:srgbClr val="5F6272"/>
+                </a:solidFill>
+              </a:rPr>
+              <a:t>5</a:t>
+            </a:fld>
+          </a:p>
+        </p:txBody>
+      </p:sp>
     </p:spTree>
   </p:cSld>
   <p:clrMapOvr>
@@ -37048,6 +37592,40 @@
               <a:t xml:space="preserve">, but different tables.</a:t>
             </a:r>
             <a:endParaRPr lang="en-US" sz="1575" dirty="0"/>
+          </a:p>
+        </p:txBody>
+      </p:sp>
+      <p:sp>
+        <p:nvSpPr>
+          <p:cNvPr id="100" name="Slide Number 100"/>
+          <p:cNvSpPr txBox="1"/>
+          <p:nvPr/>
+        </p:nvSpPr>
+        <p:spPr>
+          <a:xfrm>
+            <a:off x="11277295" y="6611112"/>
+            <a:ext cx="685800" cy="201168"/>
+          </a:xfrm>
+          <a:prstGeom prst="rect">
+            <a:avLst/>
+          </a:prstGeom>
+          <a:noFill/>
+        </p:spPr>
+        <p:txBody>
+          <a:bodyPr wrap="none" lIns="0" tIns="0" rIns="0" bIns="0" anchor="b">
+            <a:noAutofit/>
+          </a:bodyPr>
+          <a:lstStyle/>
+          <a:p>
+            <a:pPr algn="r"/>
+            <a:fld id="{5C1A6E0B-3B1F-4D5E-9C7A-2F4B8D6E1A90}" type="slidenum">
+              <a:rPr lang="en-US" sz="1200" dirty="0">
+                <a:solidFill>
+                  <a:srgbClr val="5F6272"/>
+                </a:solidFill>
+              </a:rPr>
+              <a:t>6</a:t>
+            </a:fld>
           </a:p>
         </p:txBody>
       </p:sp>
@@ -40520,6 +41098,40 @@
           </a:p>
         </p:txBody>
       </p:sp>
+      <p:sp>
+        <p:nvSpPr>
+          <p:cNvPr id="12" name="Slide Number 12"/>
+          <p:cNvSpPr txBox="1"/>
+          <p:nvPr/>
+        </p:nvSpPr>
+        <p:spPr>
+          <a:xfrm>
+            <a:off x="11277295" y="6611112"/>
+            <a:ext cx="685800" cy="201168"/>
+          </a:xfrm>
+          <a:prstGeom prst="rect">
+            <a:avLst/>
+          </a:prstGeom>
+          <a:noFill/>
+        </p:spPr>
+        <p:txBody>
+          <a:bodyPr wrap="none" lIns="0" tIns="0" rIns="0" bIns="0" anchor="b">
+            <a:noAutofit/>
+          </a:bodyPr>
+          <a:lstStyle/>
+          <a:p>
+            <a:pPr algn="r"/>
+            <a:fld id="{5C1A6E0B-3B1F-4D5E-9C7A-2F4B8D6E1A90}" type="slidenum">
+              <a:rPr lang="en-US" sz="1200" dirty="0">
+                <a:solidFill>
+                  <a:srgbClr val="5F6272"/>
+                </a:solidFill>
+              </a:rPr>
+              <a:t>7</a:t>
+            </a:fld>
+          </a:p>
+        </p:txBody>
+      </p:sp>
     </p:spTree>
   </p:cSld>
   <p:clrMapOvr>
@@ -43309,6 +43921,40 @@
           </a:p>
         </p:txBody>
       </p:sp>
+      <p:sp>
+        <p:nvSpPr>
+          <p:cNvPr id="66" name="Slide Number 66"/>
+          <p:cNvSpPr txBox="1"/>
+          <p:nvPr/>
+        </p:nvSpPr>
+        <p:spPr>
+          <a:xfrm>
+            <a:off x="11277295" y="6611112"/>
+            <a:ext cx="685800" cy="201168"/>
+          </a:xfrm>
+          <a:prstGeom prst="rect">
+            <a:avLst/>
+          </a:prstGeom>
+          <a:noFill/>
+        </p:spPr>
+        <p:txBody>
+          <a:bodyPr wrap="none" lIns="0" tIns="0" rIns="0" bIns="0" anchor="b">
+            <a:noAutofit/>
+          </a:bodyPr>
+          <a:lstStyle/>
+          <a:p>
+            <a:pPr algn="r"/>
+            <a:fld id="{5C1A6E0B-3B1F-4D5E-9C7A-2F4B8D6E1A90}" type="slidenum">
+              <a:rPr lang="en-US" sz="1200" dirty="0">
+                <a:solidFill>
+                  <a:srgbClr val="5F6272"/>
+                </a:solidFill>
+              </a:rPr>
+              <a:t>8</a:t>
+            </a:fld>
+          </a:p>
+        </p:txBody>
+      </p:sp>
     </p:spTree>
   </p:cSld>
   <p:clrMapOvr>
@@ -44475,6 +45121,40 @@
               <a:t xml:space="preserve">.</a:t>
             </a:r>
             <a:endParaRPr lang="en-US" sz="1950" dirty="0"/>
+          </a:p>
+        </p:txBody>
+      </p:sp>
+      <p:sp>
+        <p:nvSpPr>
+          <p:cNvPr id="7" name="Slide Number 7"/>
+          <p:cNvSpPr txBox="1"/>
+          <p:nvPr/>
+        </p:nvSpPr>
+        <p:spPr>
+          <a:xfrm>
+            <a:off x="11277295" y="6611112"/>
+            <a:ext cx="685800" cy="201168"/>
+          </a:xfrm>
+          <a:prstGeom prst="rect">
+            <a:avLst/>
+          </a:prstGeom>
+          <a:noFill/>
+        </p:spPr>
+        <p:txBody>
+          <a:bodyPr wrap="none" lIns="0" tIns="0" rIns="0" bIns="0" anchor="b">
+            <a:noAutofit/>
+          </a:bodyPr>
+          <a:lstStyle/>
+          <a:p>
+            <a:pPr algn="r"/>
+            <a:fld id="{5C1A6E0B-3B1F-4D5E-9C7A-2F4B8D6E1A90}" type="slidenum">
+              <a:rPr lang="en-US" sz="1200" dirty="0">
+                <a:solidFill>
+                  <a:srgbClr val="5F6272"/>
+                </a:solidFill>
+              </a:rPr>
+              <a:t>9</a:t>
+            </a:fld>
           </a:p>
         </p:txBody>
       </p:sp>

--- a/Module 2 topic 2/t2-lesson2-vertical-horizontal-transformations.pptx
+++ b/Module 2 topic 2/t2-lesson2-vertical-horizontal-transformations.pptx
@@ -295,7 +295,7 @@
           <a:p>
             <a:r>
               <a:rPr lang="en-US" dirty="0"/>
-              <a:t>Added for this deck; not from the textbook. Have this up as students walk in; they work silently while you take attendance (about 5 minutes). The same 4 questions are on the online Day 2 bell work. Reveal the answers one at a time. Answer key: 1. A horizontal translation right 5 subtracts 5 from the input: f(x − 5). 2. f(x − 5) = x − 5 = f(x) − 5, a vertical translation down 5. 3. 2(x + 4) − 1 = 2x + 8 − 1 = 2x + 7. 4. f(2x) = 2x and 2f(x) = 2x. For the parent function they match.</a:t>
+              <a:t>Added for this deck; not from the textbook. Have this up as students walk in; they work silently while you take attendance (about 5 minutes). The same 4 questions are on the online Day 2 bell work. Reveal the answers one at a time. Answer key: 1. A horizontal translation right 5 subtracts 5 from the input: f(x − 5). 2. f(x − 5) = x − 5 = f(x) − 5, a vertical translation down 5. 3. 2(x + 4) − 1 = 2x + 8 − 1 = 2x + 7. 4. Right 2 means f(x − 2) = 3(x − 2). Distribute: 3x − 6.</a:t>
             </a:r>
           </a:p>
         </p:txBody>
@@ -826,7 +826,7 @@
           <a:p>
             <a:r>
               <a:rPr lang="en-US" dirty="0"/>
-              <a:t>Added for this deck; not from the textbook. Have this up as students walk in; they work silently while you take attendance (about 5 minutes). The same 4 questions are on the online Day 1 bell work. Reveal the answers one at a time. Answer key: 1. Subtracting from the output is a vertical translation down 3. 2. In y = mx + b, m is the slope. 3. Set g(x) = 0: 3x − 8 = 0, so x = 8/3. 4. The slope −⅔ is negative, so the line falls from left to right.</a:t>
+              <a:t>Added for this deck; not from the textbook. Have this up as students walk in; they work silently while you take attendance (about 5 minutes). The same 4 questions are on the online Day 1 bell work. Reveal the answers one at a time. Answer key: 1. Subtracting from the output is a vertical translation down 3. 2. In y = mx + b, m is the slope. 3. Set g(x) = 0: 3x − 8 = 0, so x = 8/3. 4. Replace f(x) with x: g(x) = 2x − 3, a vertical dilation by 2 and a translation down 3.</a:t>
             </a:r>
           </a:p>
         </p:txBody>
@@ -3487,7 +3487,7 @@
         <p:spPr>
           <a:xfrm>
             <a:off x="6362548" y="3243834"/>
-            <a:ext cx="5143348" cy="649224"/>
+            <a:ext cx="5143348" cy="946404"/>
           </a:xfrm>
           <a:prstGeom prst="rect">
             <a:avLst/>
@@ -3516,7 +3516,7 @@
                 <a:latin typeface="Segoe UI"/>
                 <a:cs typeface="Segoe UI"/>
               </a:rPr>
-              <a:t xml:space="preserve">4. For </a:t>
+              <a:t xml:space="preserve">4. The graph of </a:t>
             </a:r>
             <a:r>
               <a:rPr lang="en-US" sz="1950" dirty="0" i="1">
@@ -3556,7 +3556,7 @@
                 <a:latin typeface="Cambria"/>
                 <a:cs typeface="Cambria"/>
               </a:rPr>
-              <a:t xml:space="preserve">) = </a:t>
+              <a:t xml:space="preserve">) = 3</a:t>
             </a:r>
             <a:r>
               <a:rPr lang="en-US" sz="1950" dirty="0" i="1">
@@ -3576,127 +3576,17 @@
                 <a:latin typeface="Segoe UI"/>
                 <a:cs typeface="Segoe UI"/>
               </a:rPr>
-              <a:t xml:space="preserve">, is the graph of </a:t>
-            </a:r>
-            <a:r>
-              <a:rPr lang="en-US" sz="1950" dirty="0" i="1">
-                <a:solidFill>
-                  <a:srgbClr val="16171D"/>
-                </a:solidFill>
-                <a:latin typeface="Cambria"/>
-                <a:cs typeface="Cambria"/>
-              </a:rPr>
-              <a:t xml:space="preserve">f</a:t>
-            </a:r>
-            <a:r>
-              <a:rPr lang="en-US" sz="1950" dirty="0">
-                <a:solidFill>
-                  <a:srgbClr val="16171D"/>
-                </a:solidFill>
-                <a:latin typeface="Cambria"/>
-                <a:cs typeface="Cambria"/>
-              </a:rPr>
-              <a:t xml:space="preserve">(2</a:t>
-            </a:r>
-            <a:r>
-              <a:rPr lang="en-US" sz="1950" dirty="0" i="1">
-                <a:solidFill>
-                  <a:srgbClr val="16171D"/>
-                </a:solidFill>
-                <a:latin typeface="Cambria"/>
-                <a:cs typeface="Cambria"/>
-              </a:rPr>
-              <a:t xml:space="preserve">x</a:t>
-            </a:r>
-            <a:r>
-              <a:rPr lang="en-US" sz="1950" dirty="0">
-                <a:solidFill>
-                  <a:srgbClr val="16171D"/>
-                </a:solidFill>
-                <a:latin typeface="Cambria"/>
-                <a:cs typeface="Cambria"/>
-              </a:rPr>
-              <a:t xml:space="preserve">)</a:t>
-            </a:r>
-            <a:r>
-              <a:rPr lang="en-US" sz="1950" dirty="0">
-                <a:solidFill>
-                  <a:srgbClr val="16171D"/>
+              <a:t xml:space="preserve"> is translated right 2 units. Which function represents the new graph? </a:t>
+            </a:r>
+            <a:r>
+              <a:rPr lang="en-US" sz="1575" dirty="0">
+                <a:solidFill>
+                  <a:srgbClr val="5F6272"/>
                 </a:solidFill>
                 <a:latin typeface="Segoe UI"/>
                 <a:cs typeface="Segoe UI"/>
               </a:rPr>
-              <a:t xml:space="preserve"> the same as the graph of </a:t>
-            </a:r>
-            <a:r>
-              <a:rPr lang="en-US" sz="1950" dirty="0">
-                <a:solidFill>
-                  <a:srgbClr val="16171D"/>
-                </a:solidFill>
-                <a:latin typeface="Cambria"/>
-                <a:cs typeface="Cambria"/>
-              </a:rPr>
-              <a:t xml:space="preserve">2</a:t>
-            </a:r>
-            <a:r>
-              <a:rPr lang="en-US" sz="1950" dirty="0" i="1">
-                <a:solidFill>
-                  <a:srgbClr val="16171D"/>
-                </a:solidFill>
-                <a:latin typeface="Cambria"/>
-                <a:cs typeface="Cambria"/>
-              </a:rPr>
-              <a:t xml:space="preserve">f</a:t>
-            </a:r>
-            <a:r>
-              <a:rPr lang="en-US" sz="1950" dirty="0">
-                <a:solidFill>
-                  <a:srgbClr val="16171D"/>
-                </a:solidFill>
-                <a:latin typeface="Cambria"/>
-                <a:cs typeface="Cambria"/>
-              </a:rPr>
-              <a:t xml:space="preserve">(</a:t>
-            </a:r>
-            <a:r>
-              <a:rPr lang="en-US" sz="1950" dirty="0" i="1">
-                <a:solidFill>
-                  <a:srgbClr val="16171D"/>
-                </a:solidFill>
-                <a:latin typeface="Cambria"/>
-                <a:cs typeface="Cambria"/>
-              </a:rPr>
-              <a:t xml:space="preserve">x</a:t>
-            </a:r>
-            <a:r>
-              <a:rPr lang="en-US" sz="1950" dirty="0">
-                <a:solidFill>
-                  <a:srgbClr val="16171D"/>
-                </a:solidFill>
-                <a:latin typeface="Cambria"/>
-                <a:cs typeface="Cambria"/>
-              </a:rPr>
-              <a:t xml:space="preserve">)</a:t>
-            </a:r>
-            <a:r>
-              <a:rPr lang="en-US" sz="1950" dirty="0">
-                <a:solidFill>
-                  <a:srgbClr val="16171D"/>
-                </a:solidFill>
-                <a:latin typeface="Segoe UI"/>
-                <a:cs typeface="Segoe UI"/>
-              </a:rPr>
-              <a:t xml:space="preserve">? </a:t>
-            </a:r>
-            <a:r>
-              <a:rPr lang="en-US" sz="1575" dirty="0">
-                <a:solidFill>
-                  <a:srgbClr val="5F6272"/>
-                </a:solidFill>
-                <a:latin typeface="Segoe UI"/>
-                <a:cs typeface="Segoe UI"/>
-              </a:rPr>
-              <a:t xml:space="preserve">(SE p. 295)</a:t>
+              <a:t xml:space="preserve">(SE p. 293)</a:t>
             </a:r>
             <a:endParaRPr lang="en-US" sz="1950" dirty="0"/>
           </a:p>
@@ -3710,8 +3600,8 @@
         </p:nvSpPr>
         <p:spPr>
           <a:xfrm>
-            <a:off x="6362548" y="4026408"/>
-            <a:ext cx="5143348" cy="518922"/>
+            <a:off x="6362548" y="4323588"/>
+            <a:ext cx="4068806" cy="518922"/>
           </a:xfrm>
           <a:prstGeom prst="roundRect">
             <a:avLst>
@@ -3747,6 +3637,16 @@
               <a:t xml:space="preserve">ANSWER   </a:t>
             </a:r>
             <a:r>
+              <a:rPr lang="en-US" sz="2325" dirty="0" i="1">
+                <a:solidFill>
+                  <a:srgbClr val="16171D"/>
+                </a:solidFill>
+                <a:latin typeface="Cambria"/>
+                <a:cs typeface="Cambria"/>
+              </a:rPr>
+              <a:t xml:space="preserve">g</a:t>
+            </a:r>
+            <a:r>
               <a:rPr lang="en-US" sz="2325" dirty="0">
                 <a:solidFill>
                   <a:srgbClr val="16171D"/>
@@ -3754,7 +3654,7 @@
                 <a:latin typeface="Cambria"/>
                 <a:cs typeface="Cambria"/>
               </a:rPr>
-              <a:t xml:space="preserve">Yes, both are </a:t>
+              <a:t xml:space="preserve">(</a:t>
             </a:r>
             <a:r>
               <a:rPr lang="en-US" sz="2325" dirty="0" i="1">
@@ -3764,7 +3664,7 @@
                 <a:latin typeface="Cambria"/>
                 <a:cs typeface="Cambria"/>
               </a:rPr>
-              <a:t xml:space="preserve">y</a:t>
+              <a:t xml:space="preserve">x</a:t>
             </a:r>
             <a:r>
               <a:rPr lang="en-US" sz="2325" dirty="0">
@@ -3774,7 +3674,7 @@
                 <a:latin typeface="Cambria"/>
                 <a:cs typeface="Cambria"/>
               </a:rPr>
-              <a:t xml:space="preserve"> = 2</a:t>
+              <a:t xml:space="preserve">) = 3</a:t>
             </a:r>
             <a:r>
               <a:rPr lang="en-US" sz="2325" dirty="0" i="1">
@@ -3785,6 +3685,16 @@
                 <a:cs typeface="Cambria"/>
               </a:rPr>
               <a:t xml:space="preserve">x</a:t>
+            </a:r>
+            <a:r>
+              <a:rPr lang="en-US" sz="2325" dirty="0">
+                <a:solidFill>
+                  <a:srgbClr val="16171D"/>
+                </a:solidFill>
+                <a:latin typeface="Cambria"/>
+                <a:cs typeface="Cambria"/>
+              </a:rPr>
+              <a:t xml:space="preserve"> − 6</a:t>
             </a:r>
             <a:endParaRPr lang="en-US" sz="2325" dirty="0"/>
           </a:p>
@@ -26995,7 +26905,7 @@
         <p:spPr>
           <a:xfrm>
             <a:off x="6362548" y="3243834"/>
-            <a:ext cx="5143348" cy="649224"/>
+            <a:ext cx="5143348" cy="946404"/>
           </a:xfrm>
           <a:prstGeom prst="rect">
             <a:avLst/>
@@ -27024,7 +26934,7 @@
                 <a:latin typeface="Segoe UI"/>
                 <a:cs typeface="Segoe UI"/>
               </a:rPr>
-              <a:t xml:space="preserve">4. Is </a:t>
+              <a:t xml:space="preserve">4. Let </a:t>
             </a:r>
             <a:r>
               <a:rPr lang="en-US" sz="1950" dirty="0" i="1">
@@ -27034,7 +26944,7 @@
                 <a:latin typeface="Cambria"/>
                 <a:cs typeface="Cambria"/>
               </a:rPr>
-              <a:t xml:space="preserve">h</a:t>
+              <a:t xml:space="preserve">f</a:t>
             </a:r>
             <a:r>
               <a:rPr lang="en-US" sz="1950" dirty="0">
@@ -27064,7 +26974,7 @@
                 <a:latin typeface="Cambria"/>
                 <a:cs typeface="Cambria"/>
               </a:rPr>
-              <a:t xml:space="preserve">) = −⅔</a:t>
+              <a:t xml:space="preserve">) = </a:t>
             </a:r>
             <a:r>
               <a:rPr lang="en-US" sz="1950" dirty="0" i="1">
@@ -27075,16 +26985,6 @@
                 <a:cs typeface="Cambria"/>
               </a:rPr>
               <a:t xml:space="preserve">x</a:t>
-            </a:r>
-            <a:r>
-              <a:rPr lang="en-US" sz="1950" dirty="0">
-                <a:solidFill>
-                  <a:srgbClr val="16171D"/>
-                </a:solidFill>
-                <a:latin typeface="Cambria"/>
-                <a:cs typeface="Cambria"/>
-              </a:rPr>
-              <a:t xml:space="preserve"> + 5</a:t>
             </a:r>
             <a:r>
               <a:rPr lang="en-US" sz="1950" dirty="0">
@@ -27094,17 +26994,157 @@
                 <a:latin typeface="Segoe UI"/>
                 <a:cs typeface="Segoe UI"/>
               </a:rPr>
-              <a:t xml:space="preserve"> increasing or decreasing? </a:t>
-            </a:r>
-            <a:r>
-              <a:rPr lang="en-US" sz="1575" dirty="0">
-                <a:solidFill>
-                  <a:srgbClr val="5F6272"/>
+              <a:t xml:space="preserve"> and </a:t>
+            </a:r>
+            <a:r>
+              <a:rPr lang="en-US" sz="1950" dirty="0" i="1">
+                <a:solidFill>
+                  <a:srgbClr val="16171D"/>
+                </a:solidFill>
+                <a:latin typeface="Cambria"/>
+                <a:cs typeface="Cambria"/>
+              </a:rPr>
+              <a:t xml:space="preserve">g</a:t>
+            </a:r>
+            <a:r>
+              <a:rPr lang="en-US" sz="1950" dirty="0">
+                <a:solidFill>
+                  <a:srgbClr val="16171D"/>
+                </a:solidFill>
+                <a:latin typeface="Cambria"/>
+                <a:cs typeface="Cambria"/>
+              </a:rPr>
+              <a:t xml:space="preserve">(</a:t>
+            </a:r>
+            <a:r>
+              <a:rPr lang="en-US" sz="1950" dirty="0" i="1">
+                <a:solidFill>
+                  <a:srgbClr val="16171D"/>
+                </a:solidFill>
+                <a:latin typeface="Cambria"/>
+                <a:cs typeface="Cambria"/>
+              </a:rPr>
+              <a:t xml:space="preserve">x</a:t>
+            </a:r>
+            <a:r>
+              <a:rPr lang="en-US" sz="1950" dirty="0">
+                <a:solidFill>
+                  <a:srgbClr val="16171D"/>
+                </a:solidFill>
+                <a:latin typeface="Cambria"/>
+                <a:cs typeface="Cambria"/>
+              </a:rPr>
+              <a:t xml:space="preserve">) = 2</a:t>
+            </a:r>
+            <a:r>
+              <a:rPr lang="en-US" sz="1950" dirty="0" i="1">
+                <a:solidFill>
+                  <a:srgbClr val="16171D"/>
+                </a:solidFill>
+                <a:latin typeface="Cambria"/>
+                <a:cs typeface="Cambria"/>
+              </a:rPr>
+              <a:t xml:space="preserve">f</a:t>
+            </a:r>
+            <a:r>
+              <a:rPr lang="en-US" sz="1950" dirty="0">
+                <a:solidFill>
+                  <a:srgbClr val="16171D"/>
+                </a:solidFill>
+                <a:latin typeface="Cambria"/>
+                <a:cs typeface="Cambria"/>
+              </a:rPr>
+              <a:t xml:space="preserve">(</a:t>
+            </a:r>
+            <a:r>
+              <a:rPr lang="en-US" sz="1950" dirty="0" i="1">
+                <a:solidFill>
+                  <a:srgbClr val="16171D"/>
+                </a:solidFill>
+                <a:latin typeface="Cambria"/>
+                <a:cs typeface="Cambria"/>
+              </a:rPr>
+              <a:t xml:space="preserve">x</a:t>
+            </a:r>
+            <a:r>
+              <a:rPr lang="en-US" sz="1950" dirty="0">
+                <a:solidFill>
+                  <a:srgbClr val="16171D"/>
+                </a:solidFill>
+                <a:latin typeface="Cambria"/>
+                <a:cs typeface="Cambria"/>
+              </a:rPr>
+              <a:t xml:space="preserve">) − 3</a:t>
+            </a:r>
+            <a:r>
+              <a:rPr lang="en-US" sz="1950" dirty="0">
+                <a:solidFill>
+                  <a:srgbClr val="16171D"/>
                 </a:solidFill>
                 <a:latin typeface="Segoe UI"/>
                 <a:cs typeface="Segoe UI"/>
               </a:rPr>
-              <a:t xml:space="preserve">(SE p. 288)</a:t>
+              <a:t xml:space="preserve">. Which is </a:t>
+            </a:r>
+            <a:r>
+              <a:rPr lang="en-US" sz="1950" dirty="0" i="1">
+                <a:solidFill>
+                  <a:srgbClr val="16171D"/>
+                </a:solidFill>
+                <a:latin typeface="Cambria"/>
+                <a:cs typeface="Cambria"/>
+              </a:rPr>
+              <a:t xml:space="preserve">g</a:t>
+            </a:r>
+            <a:r>
+              <a:rPr lang="en-US" sz="1950" dirty="0">
+                <a:solidFill>
+                  <a:srgbClr val="16171D"/>
+                </a:solidFill>
+                <a:latin typeface="Cambria"/>
+                <a:cs typeface="Cambria"/>
+              </a:rPr>
+              <a:t xml:space="preserve">(</a:t>
+            </a:r>
+            <a:r>
+              <a:rPr lang="en-US" sz="1950" dirty="0" i="1">
+                <a:solidFill>
+                  <a:srgbClr val="16171D"/>
+                </a:solidFill>
+                <a:latin typeface="Cambria"/>
+                <a:cs typeface="Cambria"/>
+              </a:rPr>
+              <a:t xml:space="preserve">x</a:t>
+            </a:r>
+            <a:r>
+              <a:rPr lang="en-US" sz="1950" dirty="0">
+                <a:solidFill>
+                  <a:srgbClr val="16171D"/>
+                </a:solidFill>
+                <a:latin typeface="Cambria"/>
+                <a:cs typeface="Cambria"/>
+              </a:rPr>
+              <a:t xml:space="preserve">)</a:t>
+            </a:r>
+            <a:r>
+              <a:rPr lang="en-US" sz="1950" dirty="0">
+                <a:solidFill>
+                  <a:srgbClr val="16171D"/>
+                </a:solidFill>
+                <a:latin typeface="Segoe UI"/>
+                <a:cs typeface="Segoe UI"/>
+              </a:rPr>
+              <a:t xml:space="preserve"> in slope-intercept form? </a:t>
+            </a:r>
+            <a:r>
+              <a:rPr lang="en-US" sz="1575" dirty="0">
+                <a:solidFill>
+                  <a:srgbClr val="5F6272"/>
+                </a:solidFill>
+                <a:latin typeface="Segoe UI"/>
+                <a:cs typeface="Segoe UI"/>
+              </a:rPr>
+              <a:t xml:space="preserve">(SE p. 280)</a:t>
             </a:r>
             <a:endParaRPr lang="en-US" sz="1950" dirty="0"/>
           </a:p>
@@ -27118,8 +27158,8 @@
         </p:nvSpPr>
         <p:spPr>
           <a:xfrm>
-            <a:off x="6362548" y="4026408"/>
-            <a:ext cx="3571326" cy="518922"/>
+            <a:off x="6362548" y="4323588"/>
+            <a:ext cx="4068806" cy="518922"/>
           </a:xfrm>
           <a:prstGeom prst="roundRect">
             <a:avLst>
@@ -27155,6 +27195,16 @@
               <a:t xml:space="preserve">ANSWER   </a:t>
             </a:r>
             <a:r>
+              <a:rPr lang="en-US" sz="2325" dirty="0" i="1">
+                <a:solidFill>
+                  <a:srgbClr val="16171D"/>
+                </a:solidFill>
+                <a:latin typeface="Cambria"/>
+                <a:cs typeface="Cambria"/>
+              </a:rPr>
+              <a:t xml:space="preserve">g</a:t>
+            </a:r>
+            <a:r>
               <a:rPr lang="en-US" sz="2325" dirty="0">
                 <a:solidFill>
                   <a:srgbClr val="16171D"/>
@@ -27162,7 +27212,47 @@
                 <a:latin typeface="Cambria"/>
                 <a:cs typeface="Cambria"/>
               </a:rPr>
-              <a:t xml:space="preserve">Decreasing</a:t>
+              <a:t xml:space="preserve">(</a:t>
+            </a:r>
+            <a:r>
+              <a:rPr lang="en-US" sz="2325" dirty="0" i="1">
+                <a:solidFill>
+                  <a:srgbClr val="16171D"/>
+                </a:solidFill>
+                <a:latin typeface="Cambria"/>
+                <a:cs typeface="Cambria"/>
+              </a:rPr>
+              <a:t xml:space="preserve">x</a:t>
+            </a:r>
+            <a:r>
+              <a:rPr lang="en-US" sz="2325" dirty="0">
+                <a:solidFill>
+                  <a:srgbClr val="16171D"/>
+                </a:solidFill>
+                <a:latin typeface="Cambria"/>
+                <a:cs typeface="Cambria"/>
+              </a:rPr>
+              <a:t xml:space="preserve">) = 2</a:t>
+            </a:r>
+            <a:r>
+              <a:rPr lang="en-US" sz="2325" dirty="0" i="1">
+                <a:solidFill>
+                  <a:srgbClr val="16171D"/>
+                </a:solidFill>
+                <a:latin typeface="Cambria"/>
+                <a:cs typeface="Cambria"/>
+              </a:rPr>
+              <a:t xml:space="preserve">x</a:t>
+            </a:r>
+            <a:r>
+              <a:rPr lang="en-US" sz="2325" dirty="0">
+                <a:solidFill>
+                  <a:srgbClr val="16171D"/>
+                </a:solidFill>
+                <a:latin typeface="Cambria"/>
+                <a:cs typeface="Cambria"/>
+              </a:rPr>
+              <a:t xml:space="preserve"> − 3</a:t>
             </a:r>
             <a:endParaRPr lang="en-US" sz="2325" dirty="0"/>
           </a:p>

--- a/Module 2 topic 2/t2-lesson2-vertical-horizontal-transformations.pptx
+++ b/Module 2 topic 2/t2-lesson2-vertical-horizontal-transformations.pptx
@@ -4226,7 +4226,7 @@
                 <a:latin typeface="Segoe UI"/>
                 <a:cs typeface="Segoe UI"/>
               </a:rPr>
-              <a:t xml:space="preserve">Day 2 · Activity 2.2 · Comparing Vertical and Horizontal Dilations · SE pp. 295–296</a:t>
+              <a:t xml:space="preserve">Day 2 · Activity 2.2 · Comparing Vertical and Horizontal Dilations · SE pp. 295–296 · ★ Essential</a:t>
             </a:r>
             <a:endParaRPr lang="en-US" sz="1200" dirty="0"/>
           </a:p>
@@ -10299,7 +10299,7 @@
                 <a:latin typeface="Segoe UI"/>
                 <a:cs typeface="Segoe UI"/>
               </a:rPr>
-              <a:t xml:space="preserve">Day 2 · Activity 2.2 · Questions 2–3 · SE p. 296</a:t>
+              <a:t xml:space="preserve">Day 2 · Activity 2.2 · Questions 2–3 · SE p. 296 · ★ Essential</a:t>
             </a:r>
             <a:endParaRPr lang="en-US" sz="1200" dirty="0"/>
           </a:p>
@@ -15462,7 +15462,7 @@
                 <a:latin typeface="Segoe UI"/>
                 <a:cs typeface="Segoe UI"/>
               </a:rPr>
-              <a:t xml:space="preserve">Day 2 · Activity 2.2 · Question 4 · SE p. 297</a:t>
+              <a:t xml:space="preserve">Day 2 · Activity 2.2 · Question 4 · SE p. 297 · ★ Essential</a:t>
             </a:r>
             <a:endParaRPr lang="en-US" sz="1200" dirty="0"/>
           </a:p>
@@ -17784,7 +17784,7 @@
                 <a:latin typeface="Segoe UI"/>
                 <a:cs typeface="Segoe UI"/>
               </a:rPr>
-              <a:t xml:space="preserve">Day 2 · Activity 2.3 · Graphing Linear Transformations · SE pp. 298–300</a:t>
+              <a:t xml:space="preserve">Day 2 · Activity 2.3 · Graphing Linear Transformations · SE pp. 298–300 · ★ Essential</a:t>
             </a:r>
             <a:endParaRPr lang="en-US" sz="1200" dirty="0"/>
           </a:p>
@@ -29489,7 +29489,7 @@
                 <a:latin typeface="Segoe UI"/>
                 <a:cs typeface="Segoe UI"/>
               </a:rPr>
-              <a:t xml:space="preserve">Day 1 · Getting Started · Hey, I Remember This! · SE p. 288</a:t>
+              <a:t xml:space="preserve">Day 1 · Getting Started · Hey, I Remember This! · SE p. 288 · ★ Essential</a:t>
             </a:r>
             <a:endParaRPr lang="en-US" sz="1200" dirty="0"/>
           </a:p>
@@ -33899,7 +33899,7 @@
                 <a:latin typeface="Segoe UI"/>
                 <a:cs typeface="Segoe UI"/>
               </a:rPr>
-              <a:t xml:space="preserve">Day 1 · Activity 2.1 · Comparing Vertical and Horizontal Translations · SE pp. 289–290</a:t>
+              <a:t xml:space="preserve">Day 1 · Activity 2.1 · Comparing Vertical and Horizontal Translations · SE pp. 289–290 · ★ Essential</a:t>
             </a:r>
             <a:endParaRPr lang="en-US" sz="1200" dirty="0"/>
           </a:p>
@@ -40180,7 +40180,7 @@
                 <a:latin typeface="Segoe UI"/>
                 <a:cs typeface="Segoe UI"/>
               </a:rPr>
-              <a:t xml:space="preserve">Day 1 · Activity 2.1 · Definitions · SE p. 291</a:t>
+              <a:t xml:space="preserve">Day 1 · Activity 2.1 · Definitions · SE p. 291 · ★ Essential</a:t>
             </a:r>
             <a:endParaRPr lang="en-US" sz="1200" dirty="0"/>
           </a:p>
@@ -41516,7 +41516,7 @@
                 <a:latin typeface="Segoe UI"/>
                 <a:cs typeface="Segoe UI"/>
               </a:rPr>
-              <a:t xml:space="preserve">Day 1 · Activity 2.1 · Questions 6–9 · SE pp. 292–294</a:t>
+              <a:t xml:space="preserve">Day 1 · Activity 2.1 · Questions 6–9 · SE pp. 292–294 · ★ Essential</a:t>
             </a:r>
             <a:endParaRPr lang="en-US" sz="1200" dirty="0"/>
           </a:p>
@@ -44812,7 +44812,7 @@
                 <a:latin typeface="Segoe UI"/>
                 <a:cs typeface="Segoe UI"/>
               </a:rPr>
-              <a:t xml:space="preserve">Day 1 · Activity 2.1 · Summary</a:t>
+              <a:t xml:space="preserve">Day 1 · Activity 2.1 · Summary · ★ Essential</a:t>
             </a:r>
             <a:endParaRPr lang="en-US" sz="1200" dirty="0"/>
           </a:p>
